--- a/openstock.pptx
+++ b/openstock.pptx
@@ -255,7 +255,7 @@
       <p15:notesGuideLst xmlns:p15="http://schemas.microsoft.com/office/powerpoint/2012/main"/>
     </p:ext>
     <p:ext uri="GoogleSlidesCustomDataVersion2">
-      <go:slidesCustomData xmlns="" xmlns:go="http://customooxmlschemas.google.com/" xmlns:ahyp="http://schemas.microsoft.com/office/drawing/2018/hyperlinkcolor" xmlns:p15="http://schemas.microsoft.com/office/powerpoint/2012/main" xmlns:p14="http://schemas.microsoft.com/office/powerpoint/2010/main" xmlns:com="http://schemas.openxmlformats.org/drawingml/2006/compatibility" xmlns:pvml="urn:schemas-microsoft-com:office:powerpoint" xmlns:v="urn:schemas-microsoft-com:vml" xmlns:o="urn:schemas-microsoft-com:office:office" xmlns:dgm="http://schemas.openxmlformats.org/drawingml/2006/diagram" xmlns:c="http://schemas.openxmlformats.org/drawingml/2006/chart" xmlns:mv="urn:schemas-microsoft-com:mac:vml" xmlns:mc="http://schemas.openxmlformats.org/markup-compatibility/2006" r:id="rId52" roundtripDataSignature="AMtx7mhqKJAzFugGzrpaCdpbPJOL8OwfdA=="/>
+      <go:slidesCustomData xmlns:mc="http://schemas.openxmlformats.org/markup-compatibility/2006" xmlns:mv="urn:schemas-microsoft-com:mac:vml" xmlns:c="http://schemas.openxmlformats.org/drawingml/2006/chart" xmlns:dgm="http://schemas.openxmlformats.org/drawingml/2006/diagram" xmlns:o="urn:schemas-microsoft-com:office:office" xmlns:v="urn:schemas-microsoft-com:vml" xmlns:pvml="urn:schemas-microsoft-com:office:powerpoint" xmlns:com="http://schemas.openxmlformats.org/drawingml/2006/compatibility" xmlns:p14="http://schemas.microsoft.com/office/powerpoint/2010/main" xmlns:p15="http://schemas.microsoft.com/office/powerpoint/2012/main" xmlns:ahyp="http://schemas.microsoft.com/office/drawing/2018/hyperlinkcolor" xmlns:go="http://customooxmlschemas.google.com/" xmlns="" r:id="rId52" roundtripDataSignature="AMtx7mhqKJAzFugGzrpaCdpbPJOL8OwfdA=="/>
     </p:ext>
   </p:extLst>
 </p:presentation>
@@ -1473,22 +1473,6 @@
     </pc:docChg>
   </pc:docChgLst>
   <pc:docChgLst>
-    <pc:chgData name="周立筠-數據應用部-永豐金證券" userId="S::liyun0222.zhou@sinopac.com::ee349c15-f274-43a3-b0c9-48d528d95247" providerId="AD" clId="Web-{A48564C8-421B-2203-E695-99D400D4424E}"/>
-    <pc:docChg chg="modSld">
-      <pc:chgData name="周立筠-數據應用部-永豐金證券" userId="S::liyun0222.zhou@sinopac.com::ee349c15-f274-43a3-b0c9-48d528d95247" providerId="AD" clId="Web-{A48564C8-421B-2203-E695-99D400D4424E}" dt="2024-08-23T09:42:27.791" v="49"/>
-      <pc:docMkLst>
-        <pc:docMk/>
-      </pc:docMkLst>
-      <pc:sldChg chg="modSp">
-        <pc:chgData name="周立筠-數據應用部-永豐金證券" userId="S::liyun0222.zhou@sinopac.com::ee349c15-f274-43a3-b0c9-48d528d95247" providerId="AD" clId="Web-{A48564C8-421B-2203-E695-99D400D4424E}" dt="2024-08-23T09:42:27.791" v="49"/>
-        <pc:sldMkLst>
-          <pc:docMk/>
-          <pc:sldMk cId="3262633635" sldId="297"/>
-        </pc:sldMkLst>
-      </pc:sldChg>
-    </pc:docChg>
-  </pc:docChgLst>
-  <pc:docChgLst>
     <pc:chgData name="張天豪-數位金融處-永豐銀行" userId="0d835702-99c9-4ef6-82d8-3ca86d4ccc15" providerId="ADAL" clId="{05C68244-A0A4-5F4B-A227-C47B6FE62571}"/>
     <pc:docChg chg="undo custSel addSld delSld modSld modMainMaster modSection">
       <pc:chgData name="張天豪-數位金融處-永豐銀行" userId="0d835702-99c9-4ef6-82d8-3ca86d4ccc15" providerId="ADAL" clId="{05C68244-A0A4-5F4B-A227-C47B6FE62571}" dt="2024-11-23T00:59:06.402" v="223" actId="12"/>
@@ -1589,6 +1573,22 @@
           </pc:sldLayoutMkLst>
         </pc:sldLayoutChg>
       </pc:sldMasterChg>
+    </pc:docChg>
+  </pc:docChgLst>
+  <pc:docChgLst>
+    <pc:chgData name="周立筠-數據應用部-永豐金證券" userId="S::liyun0222.zhou@sinopac.com::ee349c15-f274-43a3-b0c9-48d528d95247" providerId="AD" clId="Web-{A48564C8-421B-2203-E695-99D400D4424E}"/>
+    <pc:docChg chg="modSld">
+      <pc:chgData name="周立筠-數據應用部-永豐金證券" userId="S::liyun0222.zhou@sinopac.com::ee349c15-f274-43a3-b0c9-48d528d95247" providerId="AD" clId="Web-{A48564C8-421B-2203-E695-99D400D4424E}" dt="2024-08-23T09:42:27.791" v="49"/>
+      <pc:docMkLst>
+        <pc:docMk/>
+      </pc:docMkLst>
+      <pc:sldChg chg="modSp">
+        <pc:chgData name="周立筠-數據應用部-永豐金證券" userId="S::liyun0222.zhou@sinopac.com::ee349c15-f274-43a3-b0c9-48d528d95247" providerId="AD" clId="Web-{A48564C8-421B-2203-E695-99D400D4424E}" dt="2024-08-23T09:42:27.791" v="49"/>
+        <pc:sldMkLst>
+          <pc:docMk/>
+          <pc:sldMk cId="3262633635" sldId="297"/>
+        </pc:sldMkLst>
+      </pc:sldChg>
     </pc:docChg>
   </pc:docChgLst>
 </pc:chgInfo>
@@ -2219,103 +2219,6 @@
           </a:bodyPr>
           <a:lstStyle/>
           <a:p>
-            <a:pPr marL="158750" indent="0">
-              <a:buNone/>
-            </a:pPr>
-            <a:r>
-              <a:rPr lang="zh-TW" altLang="en-US" sz="1400" dirty="0"/>
-              <a:t>各位好，今天要介紹的是 </a:t>
-            </a:r>
-            <a:r>
-              <a:rPr lang="en" altLang="zh-TW" sz="1400" dirty="0" err="1"/>
-              <a:t>OpenStock</a:t>
-            </a:r>
-            <a:r>
-              <a:rPr lang="zh-TW" altLang="en" sz="1400" dirty="0"/>
-              <a:t>，</a:t>
-            </a:r>
-            <a:r>
-              <a:rPr lang="zh-TW" altLang="en-US" sz="1400" dirty="0"/>
-              <a:t>一個開源股票市場資訊平台。</a:t>
-            </a:r>
-            <a:endParaRPr lang="en-US" altLang="zh-TW" sz="1400" dirty="0"/>
-          </a:p>
-          <a:p>
-            <a:pPr marL="158750" indent="0">
-              <a:buNone/>
-            </a:pPr>
-            <a:endParaRPr lang="zh-TW" altLang="en-US" sz="1400" dirty="0"/>
-          </a:p>
-          <a:p>
-            <a:pPr marL="158750" indent="0">
-              <a:buNone/>
-            </a:pPr>
-            <a:r>
-              <a:rPr lang="zh-TW" altLang="en-US" sz="1400" dirty="0"/>
-              <a:t>這份簡報會先說明 </a:t>
-            </a:r>
-            <a:r>
-              <a:rPr lang="en" altLang="zh-TW" sz="1400" dirty="0" err="1"/>
-              <a:t>OpenStock</a:t>
-            </a:r>
-            <a:r>
-              <a:rPr lang="en" altLang="zh-TW" sz="1400" dirty="0"/>
-              <a:t> </a:t>
-            </a:r>
-            <a:r>
-              <a:rPr lang="zh-TW" altLang="en-US" sz="1400" dirty="0"/>
-              <a:t>是什麼，再介紹它背後使用的主要工具與服務。後半段會聚焦三個關鍵整合：</a:t>
-            </a:r>
-            <a:r>
-              <a:rPr lang="en" altLang="zh-TW" sz="1400" dirty="0" err="1"/>
-              <a:t>Finnhub</a:t>
-            </a:r>
-            <a:r>
-              <a:rPr lang="zh-TW" altLang="en" sz="1400" dirty="0"/>
-              <a:t>、</a:t>
-            </a:r>
-            <a:r>
-              <a:rPr lang="en" altLang="zh-TW" sz="1400" dirty="0" err="1"/>
-              <a:t>TradingView</a:t>
-            </a:r>
-            <a:r>
-              <a:rPr lang="en" altLang="zh-TW" sz="1400" dirty="0"/>
-              <a:t> </a:t>
-            </a:r>
-            <a:r>
-              <a:rPr lang="zh-TW" altLang="en-US" sz="1400" dirty="0"/>
-              <a:t>和 </a:t>
-            </a:r>
-            <a:r>
-              <a:rPr lang="en" altLang="zh-TW" sz="1400" dirty="0" err="1"/>
-              <a:t>Inngest</a:t>
-            </a:r>
-            <a:r>
-              <a:rPr lang="zh-TW" altLang="en" sz="1400" dirty="0"/>
-              <a:t>，</a:t>
-            </a:r>
-            <a:r>
-              <a:rPr lang="zh-TW" altLang="en-US" sz="1400" dirty="0"/>
-              <a:t>分別說明它們如何支撐市場資料、圖表呈現與背景自動化。</a:t>
-            </a:r>
-            <a:endParaRPr lang="en-US" altLang="zh-TW" sz="1400" dirty="0"/>
-          </a:p>
-          <a:p>
-            <a:pPr marL="158750" indent="0">
-              <a:buNone/>
-            </a:pPr>
-            <a:endParaRPr lang="zh-TW" altLang="en-US" sz="1400" dirty="0"/>
-          </a:p>
-          <a:p>
-            <a:pPr marL="158750" indent="0">
-              <a:buNone/>
-            </a:pPr>
-            <a:r>
-              <a:rPr lang="zh-TW" altLang="en-US" sz="1400" dirty="0"/>
-              <a:t>今天不會深入程式碼細節，而是從產品與整合架構的角度，理解這類金融資訊平台可以如何快速組合出來。</a:t>
-            </a:r>
-          </a:p>
-          <a:p>
             <a:pPr marL="0" lvl="0" indent="0" algn="l" rtl="0">
               <a:lnSpc>
                 <a:spcPct val="90000"/>
@@ -2438,122 +2341,7 @@
             <a:pPr marL="158750" indent="0">
               <a:buNone/>
             </a:pPr>
-            <a:r>
-              <a:rPr lang="zh-TW" altLang="en-US" dirty="0"/>
-              <a:t>接下來先看 </a:t>
-            </a:r>
-            <a:r>
-              <a:rPr lang="en" altLang="zh-TW" dirty="0" err="1"/>
-              <a:t>OpenStock</a:t>
-            </a:r>
-            <a:r>
-              <a:rPr lang="en" altLang="zh-TW" dirty="0"/>
-              <a:t> </a:t>
-            </a:r>
-            <a:r>
-              <a:rPr lang="zh-TW" altLang="en-US" dirty="0"/>
-              <a:t>的定位。</a:t>
-            </a:r>
-            <a:endParaRPr lang="en-US" altLang="zh-TW" dirty="0"/>
-          </a:p>
-          <a:p>
-            <a:pPr marL="158750" indent="0">
-              <a:buNone/>
-            </a:pPr>
             <a:endParaRPr lang="zh-TW" altLang="en-US" dirty="0"/>
-          </a:p>
-          <a:p>
-            <a:pPr marL="158750" indent="0">
-              <a:buNone/>
-            </a:pPr>
-            <a:r>
-              <a:rPr lang="en" altLang="zh-TW" dirty="0" err="1"/>
-              <a:t>OpenStock</a:t>
-            </a:r>
-            <a:r>
-              <a:rPr lang="en" altLang="zh-TW" dirty="0"/>
-              <a:t> </a:t>
-            </a:r>
-            <a:r>
-              <a:rPr lang="zh-TW" altLang="en-US" dirty="0"/>
-              <a:t>是一個開源股票市場資訊平台，也可以理解成可自架的股票看盤工具。</a:t>
-            </a:r>
-            <a:endParaRPr lang="en-US" altLang="zh-TW" dirty="0"/>
-          </a:p>
-          <a:p>
-            <a:pPr marL="158750" indent="0">
-              <a:buNone/>
-            </a:pPr>
-            <a:endParaRPr lang="zh-TW" altLang="en-US" dirty="0"/>
-          </a:p>
-          <a:p>
-            <a:pPr marL="158750" indent="0">
-              <a:buNone/>
-            </a:pPr>
-            <a:r>
-              <a:rPr lang="zh-TW" altLang="en-US" dirty="0"/>
-              <a:t>它提供市場概覽、個股查詢、觀察清單、價格提醒與自動摘要等功能，適合用在學習展示、內部 </a:t>
-            </a:r>
-            <a:r>
-              <a:rPr lang="en" altLang="zh-TW" dirty="0"/>
-              <a:t>PoC</a:t>
-            </a:r>
-            <a:r>
-              <a:rPr lang="zh-TW" altLang="en" dirty="0"/>
-              <a:t>，</a:t>
-            </a:r>
-            <a:r>
-              <a:rPr lang="zh-TW" altLang="en-US" dirty="0"/>
-              <a:t>或投資資訊整理。</a:t>
-            </a:r>
-            <a:endParaRPr lang="en-US" altLang="zh-TW" dirty="0"/>
-          </a:p>
-          <a:p>
-            <a:pPr marL="158750" indent="0">
-              <a:buNone/>
-            </a:pPr>
-            <a:endParaRPr lang="zh-TW" altLang="en-US" dirty="0"/>
-          </a:p>
-          <a:p>
-            <a:pPr marL="158750" indent="0">
-              <a:buNone/>
-            </a:pPr>
-            <a:r>
-              <a:rPr lang="zh-TW" altLang="en-US" dirty="0"/>
-              <a:t>使用者可以先透過市場總覽掌握整體狀況，再搜尋特定股票，查看股價圖表、公司資料與技術分析。如果有想長期追蹤的標的，也可以加入觀察清單，並設定價格提醒。</a:t>
-            </a:r>
-            <a:endParaRPr lang="en-US" altLang="zh-TW" dirty="0"/>
-          </a:p>
-          <a:p>
-            <a:pPr marL="158750" indent="0">
-              <a:buNone/>
-            </a:pPr>
-            <a:endParaRPr lang="zh-TW" altLang="en-US" dirty="0"/>
-          </a:p>
-          <a:p>
-            <a:pPr marL="158750" indent="0">
-              <a:buNone/>
-            </a:pPr>
-            <a:r>
-              <a:rPr lang="zh-TW" altLang="en-US" dirty="0"/>
-              <a:t>不過</a:t>
-            </a:r>
-            <a:r>
-              <a:rPr lang="en-US" altLang="zh-TW" dirty="0"/>
-              <a:t> </a:t>
-            </a:r>
-            <a:r>
-              <a:rPr lang="en" altLang="zh-TW" dirty="0" err="1"/>
-              <a:t>OpenStock</a:t>
-            </a:r>
-            <a:r>
-              <a:rPr lang="en" altLang="zh-TW" dirty="0"/>
-              <a:t> </a:t>
-            </a:r>
-            <a:r>
-              <a:rPr lang="zh-TW" altLang="en-US" dirty="0"/>
-              <a:t>不是券商系統，不能下單，也不提供投資建議。它比較像是一個「看市場、追股票、做提醒」的資訊型平台。</a:t>
-            </a:r>
           </a:p>
         </p:txBody>
       </p:sp>
@@ -2618,304 +2406,6 @@
         <p:txBody>
           <a:bodyPr/>
           <a:lstStyle/>
-          <a:p>
-            <a:pPr marL="158750" indent="0">
-              <a:buNone/>
-            </a:pPr>
-            <a:r>
-              <a:rPr lang="zh-TW" altLang="en-US" dirty="0"/>
-              <a:t>這一頁來看 </a:t>
-            </a:r>
-            <a:r>
-              <a:rPr lang="en" altLang="zh-TW" dirty="0" err="1"/>
-              <a:t>OpenStock</a:t>
-            </a:r>
-            <a:r>
-              <a:rPr lang="en" altLang="zh-TW" dirty="0"/>
-              <a:t> </a:t>
-            </a:r>
-            <a:r>
-              <a:rPr lang="zh-TW" altLang="en-US" dirty="0"/>
-              <a:t>背後用了哪些工具與服務。</a:t>
-            </a:r>
-            <a:endParaRPr lang="en-US" altLang="zh-TW" dirty="0"/>
-          </a:p>
-          <a:p>
-            <a:pPr marL="158750" indent="0">
-              <a:buNone/>
-            </a:pPr>
-            <a:endParaRPr lang="zh-TW" altLang="en-US" dirty="0"/>
-          </a:p>
-          <a:p>
-            <a:pPr marL="158750" indent="0">
-              <a:buNone/>
-            </a:pPr>
-            <a:r>
-              <a:rPr lang="zh-TW" altLang="en-US" dirty="0"/>
-              <a:t>網頁平台使用 </a:t>
-            </a:r>
-            <a:r>
-              <a:rPr lang="en" altLang="zh-TW" dirty="0" err="1"/>
-              <a:t>Next.js</a:t>
-            </a:r>
-            <a:r>
-              <a:rPr lang="en" altLang="zh-TW" dirty="0"/>
-              <a:t> </a:t>
-            </a:r>
-            <a:r>
-              <a:rPr lang="zh-TW" altLang="en-US" dirty="0"/>
-              <a:t>和 </a:t>
-            </a:r>
-            <a:r>
-              <a:rPr lang="en" altLang="zh-TW" dirty="0"/>
-              <a:t>React</a:t>
-            </a:r>
-            <a:r>
-              <a:rPr lang="zh-TW" altLang="en" dirty="0"/>
-              <a:t>，</a:t>
-            </a:r>
-            <a:r>
-              <a:rPr lang="zh-TW" altLang="en-US" dirty="0"/>
-              <a:t>負責使用者看到的介面與操作流程。使用者資料則透過 </a:t>
-            </a:r>
-            <a:r>
-              <a:rPr lang="en" altLang="zh-TW" dirty="0"/>
-              <a:t>MongoDB </a:t>
-            </a:r>
-            <a:r>
-              <a:rPr lang="zh-TW" altLang="en-US" dirty="0"/>
-              <a:t>保存，例如帳號、觀察清單與價格提醒條件。身分驗證使用 </a:t>
-            </a:r>
-            <a:r>
-              <a:rPr lang="en" altLang="zh-TW" dirty="0"/>
-              <a:t>Better Auth</a:t>
-            </a:r>
-            <a:r>
-              <a:rPr lang="zh-TW" altLang="en" dirty="0"/>
-              <a:t>，</a:t>
-            </a:r>
-            <a:r>
-              <a:rPr lang="zh-TW" altLang="en-US" dirty="0"/>
-              <a:t>處理登入、註冊與權限保護。</a:t>
-            </a:r>
-            <a:endParaRPr lang="en-US" altLang="zh-TW" dirty="0"/>
-          </a:p>
-          <a:p>
-            <a:pPr marL="158750" indent="0">
-              <a:buNone/>
-            </a:pPr>
-            <a:endParaRPr lang="zh-TW" altLang="en-US" dirty="0"/>
-          </a:p>
-          <a:p>
-            <a:pPr marL="158750" indent="0">
-              <a:buNone/>
-            </a:pPr>
-            <a:r>
-              <a:rPr lang="zh-TW" altLang="en-US" dirty="0"/>
-              <a:t>市場資料來源是 </a:t>
-            </a:r>
-            <a:r>
-              <a:rPr lang="en" altLang="zh-TW" dirty="0" err="1"/>
-              <a:t>Finnhub</a:t>
-            </a:r>
-            <a:r>
-              <a:rPr lang="zh-TW" altLang="en" dirty="0"/>
-              <a:t>，</a:t>
-            </a:r>
-            <a:r>
-              <a:rPr lang="zh-TW" altLang="en-US" dirty="0"/>
-              <a:t>提供股票報價、公司資訊與市場新聞。圖表呈現整合 </a:t>
-            </a:r>
-            <a:r>
-              <a:rPr lang="en" altLang="zh-TW" dirty="0" err="1"/>
-              <a:t>TradingView</a:t>
-            </a:r>
-            <a:r>
-              <a:rPr lang="zh-TW" altLang="en" dirty="0"/>
-              <a:t>，</a:t>
-            </a:r>
-            <a:r>
-              <a:rPr lang="zh-TW" altLang="en-US" dirty="0"/>
-              <a:t>讓平台具備市場總覽、熱度圖、個股走勢與技術分析能力。</a:t>
-            </a:r>
-            <a:endParaRPr lang="en-US" altLang="zh-TW" dirty="0"/>
-          </a:p>
-          <a:p>
-            <a:pPr marL="158750" indent="0">
-              <a:buNone/>
-            </a:pPr>
-            <a:endParaRPr lang="zh-TW" altLang="en-US" dirty="0"/>
-          </a:p>
-          <a:p>
-            <a:pPr marL="158750" indent="0">
-              <a:buNone/>
-            </a:pPr>
-            <a:r>
-              <a:rPr lang="zh-TW" altLang="en-US" dirty="0"/>
-              <a:t>背景任務使用 </a:t>
-            </a:r>
-            <a:r>
-              <a:rPr lang="en" altLang="zh-TW" dirty="0" err="1"/>
-              <a:t>Inngest</a:t>
-            </a:r>
-            <a:r>
-              <a:rPr lang="zh-TW" altLang="en" dirty="0"/>
-              <a:t>，</a:t>
-            </a:r>
-            <a:r>
-              <a:rPr lang="zh-TW" altLang="en-US" dirty="0"/>
-              <a:t>負責價格提醒檢查、摘要產生與通知流程。</a:t>
-            </a:r>
-            <a:r>
-              <a:rPr lang="en" altLang="zh-TW" dirty="0"/>
-              <a:t>Email </a:t>
-            </a:r>
-            <a:r>
-              <a:rPr lang="zh-TW" altLang="en-US" dirty="0"/>
-              <a:t>通知透過 </a:t>
-            </a:r>
-            <a:r>
-              <a:rPr lang="en" altLang="zh-TW" dirty="0" err="1"/>
-              <a:t>Nodemailer</a:t>
-            </a:r>
-            <a:r>
-              <a:rPr lang="en" altLang="zh-TW" dirty="0"/>
-              <a:t> </a:t>
-            </a:r>
-            <a:r>
-              <a:rPr lang="zh-TW" altLang="en-US" dirty="0"/>
-              <a:t>發送，</a:t>
-            </a:r>
-            <a:r>
-              <a:rPr lang="en" altLang="zh-TW" dirty="0"/>
-              <a:t>AI </a:t>
-            </a:r>
-            <a:r>
-              <a:rPr lang="zh-TW" altLang="en-US" dirty="0"/>
-              <a:t>摘要則可搭配 </a:t>
-            </a:r>
-            <a:r>
-              <a:rPr lang="en" altLang="zh-TW" dirty="0"/>
-              <a:t>Gemini</a:t>
-            </a:r>
-            <a:r>
-              <a:rPr lang="zh-TW" altLang="en" dirty="0"/>
-              <a:t>、</a:t>
-            </a:r>
-            <a:r>
-              <a:rPr lang="en" altLang="zh-TW" dirty="0" err="1"/>
-              <a:t>MiniMax</a:t>
-            </a:r>
-            <a:r>
-              <a:rPr lang="en" altLang="zh-TW" dirty="0"/>
-              <a:t> </a:t>
-            </a:r>
-            <a:r>
-              <a:rPr lang="zh-TW" altLang="en-US" dirty="0"/>
-              <a:t>或 </a:t>
-            </a:r>
-            <a:r>
-              <a:rPr lang="en" altLang="zh-TW" dirty="0" err="1"/>
-              <a:t>Siray</a:t>
-            </a:r>
-            <a:r>
-              <a:rPr lang="zh-TW" altLang="en" dirty="0"/>
-              <a:t>。</a:t>
-            </a:r>
-            <a:endParaRPr lang="en-US" altLang="zh-TW" dirty="0"/>
-          </a:p>
-          <a:p>
-            <a:pPr marL="158750" indent="0">
-              <a:buNone/>
-            </a:pPr>
-            <a:endParaRPr lang="en-US" altLang="zh-TW" dirty="0"/>
-          </a:p>
-          <a:p>
-            <a:pPr marL="158750" marR="0" lvl="0" indent="0" algn="l" defTabSz="914400" rtl="0" eaLnBrk="1" fontAlgn="auto" latinLnBrk="0" hangingPunct="1">
-              <a:lnSpc>
-                <a:spcPct val="100000"/>
-              </a:lnSpc>
-              <a:spcBef>
-                <a:spcPts val="0"/>
-              </a:spcBef>
-              <a:spcAft>
-                <a:spcPts val="0"/>
-              </a:spcAft>
-              <a:buClr>
-                <a:srgbClr val="000000"/>
-              </a:buClr>
-              <a:buSzPts val="1100"/>
-              <a:buFont typeface="Arial"/>
-              <a:buNone/>
-              <a:tabLst/>
-              <a:defRPr/>
-            </a:pPr>
-            <a:r>
-              <a:rPr lang="zh-TW" altLang="en-US" dirty="0"/>
-              <a:t>簡單來說，</a:t>
-            </a:r>
-            <a:r>
-              <a:rPr lang="en" altLang="zh-TW" dirty="0" err="1"/>
-              <a:t>OpenStock</a:t>
-            </a:r>
-            <a:r>
-              <a:rPr lang="en" altLang="zh-TW" dirty="0"/>
-              <a:t> </a:t>
-            </a:r>
-            <a:r>
-              <a:rPr lang="zh-TW" altLang="en-US" dirty="0"/>
-              <a:t>整合了網頁介面、資料儲存、登入機制、市場資料串接、圖表視覺化與背景自動化流程，並透過 </a:t>
-            </a:r>
-            <a:r>
-              <a:rPr lang="en" altLang="zh-TW" dirty="0" err="1"/>
-              <a:t>Finnhub</a:t>
-            </a:r>
-            <a:r>
-              <a:rPr lang="zh-TW" altLang="en" dirty="0"/>
-              <a:t>、</a:t>
-            </a:r>
-            <a:r>
-              <a:rPr lang="en" altLang="zh-TW" dirty="0" err="1"/>
-              <a:t>TradingView</a:t>
-            </a:r>
-            <a:r>
-              <a:rPr lang="zh-TW" altLang="en" dirty="0"/>
-              <a:t>、</a:t>
-            </a:r>
-            <a:r>
-              <a:rPr lang="en" altLang="zh-TW" dirty="0" err="1"/>
-              <a:t>Inngest</a:t>
-            </a:r>
-            <a:r>
-              <a:rPr lang="en" altLang="zh-TW" dirty="0"/>
-              <a:t> </a:t>
-            </a:r>
-            <a:r>
-              <a:rPr lang="zh-TW" altLang="en-US" dirty="0"/>
-              <a:t>等外部服務，補足即時行情、互動圖表與排程任務等核心能力。</a:t>
-            </a:r>
-          </a:p>
-          <a:p>
-            <a:pPr marL="158750" indent="0">
-              <a:buNone/>
-            </a:pPr>
-            <a:endParaRPr lang="en-US" altLang="zh-TW" dirty="0"/>
-          </a:p>
-          <a:p>
-            <a:pPr marL="158750" indent="0">
-              <a:buNone/>
-            </a:pPr>
-            <a:endParaRPr lang="zh-TW" altLang="zh-TW" sz="1100" b="0" i="0" u="none" strike="noStrike" cap="none" dirty="0">
-              <a:solidFill>
-                <a:srgbClr val="000000"/>
-              </a:solidFill>
-              <a:effectLst/>
-              <a:latin typeface="Arial"/>
-              <a:ea typeface="Arial"/>
-              <a:cs typeface="Arial"/>
-              <a:sym typeface="Arial"/>
-            </a:endParaRPr>
-          </a:p>
           <a:p>
             <a:pPr marL="158750" indent="0">
               <a:buNone/>
@@ -2989,150 +2479,6 @@
             <a:pPr marL="158750" indent="0">
               <a:buNone/>
             </a:pPr>
-            <a:r>
-              <a:rPr lang="zh-TW" altLang="en-US" dirty="0"/>
-              <a:t>接下來聚焦三個最關鍵的服務，先從市場資料來源 </a:t>
-            </a:r>
-            <a:r>
-              <a:rPr lang="en" altLang="zh-TW" dirty="0" err="1"/>
-              <a:t>Finnhub</a:t>
-            </a:r>
-            <a:r>
-              <a:rPr lang="en" altLang="zh-TW" dirty="0"/>
-              <a:t> </a:t>
-            </a:r>
-            <a:r>
-              <a:rPr lang="zh-TW" altLang="en-US" dirty="0"/>
-              <a:t>開始。</a:t>
-            </a:r>
-            <a:endParaRPr lang="en-US" altLang="zh-TW" dirty="0"/>
-          </a:p>
-          <a:p>
-            <a:pPr marL="158750" indent="0">
-              <a:buNone/>
-            </a:pPr>
-            <a:endParaRPr lang="zh-TW" altLang="en-US" dirty="0"/>
-          </a:p>
-          <a:p>
-            <a:pPr marL="158750" indent="0">
-              <a:buNone/>
-            </a:pPr>
-            <a:r>
-              <a:rPr lang="en" altLang="zh-TW" dirty="0" err="1"/>
-              <a:t>Finnhub</a:t>
-            </a:r>
-            <a:r>
-              <a:rPr lang="en" altLang="zh-TW" dirty="0"/>
-              <a:t> </a:t>
-            </a:r>
-            <a:r>
-              <a:rPr lang="zh-TW" altLang="en-US" dirty="0"/>
-              <a:t>本質上是一個金融市場資料 </a:t>
-            </a:r>
-            <a:r>
-              <a:rPr lang="en" altLang="zh-TW" dirty="0"/>
-              <a:t>API </a:t>
-            </a:r>
-            <a:r>
-              <a:rPr lang="zh-TW" altLang="en-US" dirty="0"/>
-              <a:t>服務，提供股票搜尋、個股報價、公司資訊與市場新聞。</a:t>
-            </a:r>
-            <a:endParaRPr lang="en-US" altLang="zh-TW" dirty="0"/>
-          </a:p>
-          <a:p>
-            <a:pPr marL="158750" indent="0">
-              <a:buNone/>
-            </a:pPr>
-            <a:endParaRPr lang="zh-TW" altLang="en-US" dirty="0"/>
-          </a:p>
-          <a:p>
-            <a:pPr marL="158750" indent="0">
-              <a:buNone/>
-            </a:pPr>
-            <a:r>
-              <a:rPr lang="zh-TW" altLang="en-US" dirty="0"/>
-              <a:t>對 </a:t>
-            </a:r>
-            <a:r>
-              <a:rPr lang="en" altLang="zh-TW" dirty="0" err="1"/>
-              <a:t>OpenStock</a:t>
-            </a:r>
-            <a:r>
-              <a:rPr lang="en" altLang="zh-TW" dirty="0"/>
-              <a:t> </a:t>
-            </a:r>
-            <a:r>
-              <a:rPr lang="zh-TW" altLang="en-US" dirty="0"/>
-              <a:t>來說，</a:t>
-            </a:r>
-            <a:r>
-              <a:rPr lang="en" altLang="zh-TW" dirty="0" err="1"/>
-              <a:t>Finnhub</a:t>
-            </a:r>
-            <a:r>
-              <a:rPr lang="en" altLang="zh-TW" dirty="0"/>
-              <a:t> </a:t>
-            </a:r>
-            <a:r>
-              <a:rPr lang="zh-TW" altLang="en-US" dirty="0"/>
-              <a:t>是外部市場資料來源。</a:t>
-            </a:r>
-            <a:r>
-              <a:rPr lang="en" altLang="zh-TW" dirty="0" err="1"/>
-              <a:t>OpenStock</a:t>
-            </a:r>
-            <a:r>
-              <a:rPr lang="en" altLang="zh-TW" dirty="0"/>
-              <a:t> </a:t>
-            </a:r>
-            <a:r>
-              <a:rPr lang="zh-TW" altLang="en-US" dirty="0"/>
-              <a:t>本身提供操作介面，但股票代號、股價、公司資料與新聞內容，都需要透過資料供應商取得。</a:t>
-            </a:r>
-            <a:endParaRPr lang="en-US" altLang="zh-TW" dirty="0"/>
-          </a:p>
-          <a:p>
-            <a:pPr marL="158750" indent="0">
-              <a:buNone/>
-            </a:pPr>
-            <a:endParaRPr lang="zh-TW" altLang="en-US" dirty="0"/>
-          </a:p>
-          <a:p>
-            <a:pPr marL="158750" indent="0">
-              <a:buNone/>
-            </a:pPr>
-            <a:r>
-              <a:rPr lang="zh-TW" altLang="en-US" dirty="0"/>
-              <a:t>使用者搜尋股票時，可以透過 </a:t>
-            </a:r>
-            <a:r>
-              <a:rPr lang="en" altLang="zh-TW" dirty="0" err="1"/>
-              <a:t>Finnhub</a:t>
-            </a:r>
-            <a:r>
-              <a:rPr lang="en" altLang="zh-TW" dirty="0"/>
-              <a:t> </a:t>
-            </a:r>
-            <a:r>
-              <a:rPr lang="zh-TW" altLang="en-US" dirty="0"/>
-              <a:t>查詢股票代號或公司名稱。進入個股頁面後，也能取得報價、公司基本資料與市場新聞，讓使用者不只看到價格，也能理解相關背景。</a:t>
-            </a:r>
-            <a:endParaRPr lang="en-US" altLang="zh-TW" dirty="0"/>
-          </a:p>
-          <a:p>
-            <a:pPr marL="158750" indent="0">
-              <a:buNone/>
-            </a:pPr>
-            <a:endParaRPr lang="zh-TW" altLang="en-US" dirty="0"/>
-          </a:p>
-          <a:p>
-            <a:pPr marL="158750" indent="0">
-              <a:buNone/>
-            </a:pPr>
-            <a:r>
-              <a:rPr lang="zh-TW" altLang="en-US" dirty="0"/>
-              <a:t>這些資料也會支援價格提醒。當使用者設定某檔股票高於或低於指定價格時，系統就需要查詢最新報價，再判斷是否觸發通知。</a:t>
-            </a:r>
             <a:endParaRPr lang="en-US" altLang="zh-TW" dirty="0"/>
           </a:p>
         </p:txBody>
@@ -3198,80 +2544,6 @@
         <p:txBody>
           <a:bodyPr/>
           <a:lstStyle/>
-          <a:p>
-            <a:pPr marL="158750" indent="0">
-              <a:buNone/>
-            </a:pPr>
-            <a:r>
-              <a:rPr lang="zh-TW" altLang="en-US" dirty="0"/>
-              <a:t>資料來源解決後，下一步就是如何讓使用者看懂這些資料。</a:t>
-            </a:r>
-            <a:endParaRPr lang="en-US" altLang="zh-TW" dirty="0"/>
-          </a:p>
-          <a:p>
-            <a:pPr marL="158750" indent="0">
-              <a:buNone/>
-            </a:pPr>
-            <a:endParaRPr lang="zh-TW" altLang="en-US" dirty="0"/>
-          </a:p>
-          <a:p>
-            <a:pPr marL="158750" indent="0">
-              <a:buNone/>
-            </a:pPr>
-            <a:r>
-              <a:rPr lang="en" altLang="zh-TW" dirty="0" err="1"/>
-              <a:t>TradingView</a:t>
-            </a:r>
-            <a:r>
-              <a:rPr lang="en" altLang="zh-TW" dirty="0"/>
-              <a:t> </a:t>
-            </a:r>
-            <a:r>
-              <a:rPr lang="zh-TW" altLang="en-US" dirty="0"/>
-              <a:t>提供市場視覺化的服務。股票資訊如果只用數字呈現，使用者不一定能快速掌握趨勢。透過市場總覽、熱度圖、股價走勢與技術分析畫面，市場狀況會變得更直覺。</a:t>
-            </a:r>
-            <a:endParaRPr lang="en-US" altLang="zh-TW" dirty="0"/>
-          </a:p>
-          <a:p>
-            <a:pPr marL="158750" indent="0">
-              <a:buNone/>
-            </a:pPr>
-            <a:endParaRPr lang="zh-TW" altLang="en-US" dirty="0"/>
-          </a:p>
-          <a:p>
-            <a:pPr marL="158750" indent="0">
-              <a:buNone/>
-            </a:pPr>
-            <a:r>
-              <a:rPr lang="zh-TW" altLang="en-US" dirty="0"/>
-              <a:t>在 </a:t>
-            </a:r>
-            <a:r>
-              <a:rPr lang="en" altLang="zh-TW" dirty="0" err="1"/>
-              <a:t>OpenStock</a:t>
-            </a:r>
-            <a:r>
-              <a:rPr lang="en" altLang="zh-TW" dirty="0"/>
-              <a:t> </a:t>
-            </a:r>
-            <a:r>
-              <a:rPr lang="zh-TW" altLang="en-US" dirty="0"/>
-              <a:t>裡，</a:t>
-            </a:r>
-            <a:r>
-              <a:rPr lang="en" altLang="zh-TW" dirty="0" err="1"/>
-              <a:t>TradingView</a:t>
-            </a:r>
-            <a:r>
-              <a:rPr lang="en" altLang="zh-TW" dirty="0"/>
-              <a:t> </a:t>
-            </a:r>
-            <a:r>
-              <a:rPr lang="zh-TW" altLang="en-US" dirty="0"/>
-              <a:t>用在首頁市場總覽，也可以用在個股頁面呈現走勢與技術分析，讓平台快速具備接近專業看盤工具的視覺體驗。</a:t>
-            </a:r>
-            <a:endParaRPr lang="en-US" altLang="zh-TW" dirty="0"/>
-          </a:p>
           <a:p>
             <a:pPr marL="158750" indent="0">
               <a:buNone/>
@@ -3345,110 +2617,7 @@
             <a:pPr marL="158750" indent="0">
               <a:buNone/>
             </a:pPr>
-            <a:r>
-              <a:rPr lang="en" altLang="zh-TW" dirty="0" err="1"/>
-              <a:t>Inngest</a:t>
-            </a:r>
-            <a:r>
-              <a:rPr lang="en" altLang="zh-TW" dirty="0"/>
-              <a:t> </a:t>
-            </a:r>
-            <a:r>
-              <a:rPr lang="zh-TW" altLang="en-US" dirty="0"/>
-              <a:t>本質上是事件驅動的背景任務與工作流平台，提供排程、事件觸發與可靠執行機制。</a:t>
-            </a:r>
-            <a:endParaRPr lang="en-US" altLang="zh-TW" dirty="0"/>
-          </a:p>
-          <a:p>
-            <a:pPr marL="158750" indent="0">
-              <a:buNone/>
-            </a:pPr>
             <a:endParaRPr lang="zh-TW" altLang="en-US" dirty="0"/>
-          </a:p>
-          <a:p>
-            <a:pPr marL="158750" indent="0">
-              <a:buNone/>
-            </a:pPr>
-            <a:r>
-              <a:rPr lang="zh-TW" altLang="en-US" dirty="0"/>
-              <a:t>在 </a:t>
-            </a:r>
-            <a:r>
-              <a:rPr lang="en" altLang="zh-TW" dirty="0" err="1"/>
-              <a:t>OpenStock</a:t>
-            </a:r>
-            <a:r>
-              <a:rPr lang="en" altLang="zh-TW" dirty="0"/>
-              <a:t> </a:t>
-            </a:r>
-            <a:r>
-              <a:rPr lang="zh-TW" altLang="en-US" dirty="0"/>
-              <a:t>裡，最典型的例子是價格提醒。使用者設定提醒後，不可能一直開著網站等待股價變化，因此系統需要在背景定期檢查價格，條件達成時再通知使用者。</a:t>
-            </a:r>
-            <a:endParaRPr lang="en-US" altLang="zh-TW" dirty="0"/>
-          </a:p>
-          <a:p>
-            <a:pPr marL="158750" indent="0">
-              <a:buNone/>
-            </a:pPr>
-            <a:endParaRPr lang="zh-TW" altLang="en-US" dirty="0"/>
-          </a:p>
-          <a:p>
-            <a:pPr marL="158750" indent="0">
-              <a:buNone/>
-            </a:pPr>
-            <a:r>
-              <a:rPr lang="zh-TW" altLang="en-US" dirty="0"/>
-              <a:t>市場摘要也是類似概念。系統可以定期整理市場新聞或摘要內容，再透過 </a:t>
-            </a:r>
-            <a:r>
-              <a:rPr lang="en" altLang="zh-TW" dirty="0"/>
-              <a:t>Email </a:t>
-            </a:r>
-            <a:r>
-              <a:rPr lang="zh-TW" altLang="en-US" dirty="0"/>
-              <a:t>提供給使用者，降低手動整理資訊的負擔。</a:t>
-            </a:r>
-            <a:endParaRPr lang="en-US" altLang="zh-TW" dirty="0"/>
-          </a:p>
-          <a:p>
-            <a:pPr marL="158750" indent="0">
-              <a:buNone/>
-            </a:pPr>
-            <a:endParaRPr lang="zh-TW" altLang="en-US" dirty="0"/>
-          </a:p>
-          <a:p>
-            <a:pPr marL="158750" indent="0">
-              <a:buNone/>
-            </a:pPr>
-            <a:r>
-              <a:rPr lang="zh-TW" altLang="en-US" dirty="0"/>
-              <a:t>所以 </a:t>
-            </a:r>
-            <a:r>
-              <a:rPr lang="en" altLang="zh-TW" dirty="0" err="1"/>
-              <a:t>Inngest</a:t>
-            </a:r>
-            <a:r>
-              <a:rPr lang="en" altLang="zh-TW" dirty="0"/>
-              <a:t> </a:t>
-            </a:r>
-            <a:r>
-              <a:rPr lang="zh-TW" altLang="en-US" dirty="0"/>
-              <a:t>就像 </a:t>
-            </a:r>
-            <a:r>
-              <a:rPr lang="en" altLang="zh-TW" dirty="0" err="1"/>
-              <a:t>OpenStock</a:t>
-            </a:r>
-            <a:r>
-              <a:rPr lang="en" altLang="zh-TW" dirty="0"/>
-              <a:t> </a:t>
-            </a:r>
-            <a:r>
-              <a:rPr lang="zh-TW" altLang="en-US" dirty="0"/>
-              <a:t>的背景工作引擎，讓平台不只是被動查詢工具，而是可以主動檢查、整理與通知。</a:t>
-            </a:r>
           </a:p>
         </p:txBody>
       </p:sp>
@@ -3517,190 +2686,7 @@
             <a:pPr marL="158750" indent="0">
               <a:buNone/>
             </a:pPr>
-            <a:r>
-              <a:rPr lang="zh-TW" altLang="en-US" dirty="0"/>
-              <a:t>到這裡，我們已經看完三個核心整合。最後一頁做整體收束。</a:t>
-            </a:r>
-            <a:endParaRPr lang="en-US" altLang="zh-TW" dirty="0"/>
-          </a:p>
-          <a:p>
-            <a:pPr marL="158750" indent="0">
-              <a:buNone/>
-            </a:pPr>
             <a:endParaRPr lang="zh-TW" altLang="en-US" dirty="0"/>
-          </a:p>
-          <a:p>
-            <a:pPr marL="158750" indent="0">
-              <a:buNone/>
-            </a:pPr>
-            <a:r>
-              <a:rPr lang="zh-TW" altLang="en-US" dirty="0"/>
-              <a:t>總結來看，</a:t>
-            </a:r>
-            <a:r>
-              <a:rPr lang="en" altLang="zh-TW" dirty="0" err="1"/>
-              <a:t>OpenStock</a:t>
-            </a:r>
-            <a:r>
-              <a:rPr lang="en" altLang="zh-TW" dirty="0"/>
-              <a:t> </a:t>
-            </a:r>
-            <a:r>
-              <a:rPr lang="zh-TW" altLang="en-US" dirty="0"/>
-              <a:t>的價值不只是股票看盤，而是展示一個開源金融資訊平台如何整合市場資料、圖表視覺化與背景自動化能力。</a:t>
-            </a:r>
-            <a:endParaRPr lang="en-US" altLang="zh-TW" dirty="0"/>
-          </a:p>
-          <a:p>
-            <a:pPr marL="158750" indent="0">
-              <a:buNone/>
-            </a:pPr>
-            <a:endParaRPr lang="zh-TW" altLang="en-US" dirty="0"/>
-          </a:p>
-          <a:p>
-            <a:pPr marL="158750" indent="0">
-              <a:buNone/>
-            </a:pPr>
-            <a:r>
-              <a:rPr lang="zh-TW" altLang="en-US" dirty="0"/>
-              <a:t>資料取得上，它透過 </a:t>
-            </a:r>
-            <a:r>
-              <a:rPr lang="en" altLang="zh-TW" dirty="0" err="1"/>
-              <a:t>Finnhub</a:t>
-            </a:r>
-            <a:r>
-              <a:rPr lang="en" altLang="zh-TW" dirty="0"/>
-              <a:t> </a:t>
-            </a:r>
-            <a:r>
-              <a:rPr lang="zh-TW" altLang="en-US" dirty="0"/>
-              <a:t>接入股票報價、公司資訊與市場新聞。資訊呈現上，它透過 </a:t>
-            </a:r>
-            <a:r>
-              <a:rPr lang="en" altLang="zh-TW" dirty="0" err="1"/>
-              <a:t>TradingView</a:t>
-            </a:r>
-            <a:r>
-              <a:rPr lang="en" altLang="zh-TW" dirty="0"/>
-              <a:t> </a:t>
-            </a:r>
-            <a:r>
-              <a:rPr lang="zh-TW" altLang="en-US" dirty="0"/>
-              <a:t>把資料轉成直覺圖表與看盤畫面。背景自動化上，它透過 </a:t>
-            </a:r>
-            <a:r>
-              <a:rPr lang="en" altLang="zh-TW" dirty="0" err="1"/>
-              <a:t>Inngest</a:t>
-            </a:r>
-            <a:r>
-              <a:rPr lang="en" altLang="zh-TW" dirty="0"/>
-              <a:t> </a:t>
-            </a:r>
-            <a:r>
-              <a:rPr lang="zh-TW" altLang="en-US" dirty="0"/>
-              <a:t>支援價格提醒、摘要產生與通知流程。</a:t>
-            </a:r>
-            <a:endParaRPr lang="en-US" altLang="zh-TW" dirty="0"/>
-          </a:p>
-          <a:p>
-            <a:pPr marL="158750" indent="0">
-              <a:buNone/>
-            </a:pPr>
-            <a:endParaRPr lang="zh-TW" altLang="en-US" dirty="0"/>
-          </a:p>
-          <a:p>
-            <a:pPr marL="158750" indent="0">
-              <a:buNone/>
-            </a:pPr>
-            <a:r>
-              <a:rPr lang="zh-TW" altLang="en-US" dirty="0"/>
-              <a:t>從產品雛形來看，</a:t>
-            </a:r>
-            <a:r>
-              <a:rPr lang="en" altLang="zh-TW" dirty="0" err="1"/>
-              <a:t>OpenStock</a:t>
-            </a:r>
-            <a:r>
-              <a:rPr lang="en" altLang="zh-TW" dirty="0"/>
-              <a:t> </a:t>
-            </a:r>
-            <a:r>
-              <a:rPr lang="zh-TW" altLang="en-US" dirty="0"/>
-              <a:t>已具備市場總覽、個股查詢、觀察清單、價格提醒與自動摘要等功能，輪廓相對完整。</a:t>
-            </a:r>
-            <a:endParaRPr lang="en-US" altLang="zh-TW" dirty="0"/>
-          </a:p>
-          <a:p>
-            <a:pPr marL="158750" indent="0">
-              <a:buNone/>
-            </a:pPr>
-            <a:endParaRPr lang="zh-TW" altLang="en-US" dirty="0"/>
-          </a:p>
-          <a:p>
-            <a:pPr marL="158750" indent="0">
-              <a:buNone/>
-            </a:pPr>
-            <a:r>
-              <a:rPr lang="zh-TW" altLang="en-US" dirty="0"/>
-              <a:t>因此，它適合作為內部 </a:t>
-            </a:r>
-            <a:r>
-              <a:rPr lang="en" altLang="zh-TW" dirty="0"/>
-              <a:t>PoC</a:t>
-            </a:r>
-            <a:r>
-              <a:rPr lang="zh-TW" altLang="en" dirty="0"/>
-              <a:t>、</a:t>
-            </a:r>
-            <a:r>
-              <a:rPr lang="zh-TW" altLang="en-US" dirty="0"/>
-              <a:t>金融資訊產品原型、技術研究，或開源平台評估案例。</a:t>
-            </a:r>
-            <a:endParaRPr lang="en-US" altLang="zh-TW" dirty="0"/>
-          </a:p>
-          <a:p>
-            <a:pPr marL="158750" indent="0">
-              <a:buNone/>
-            </a:pPr>
-            <a:endParaRPr lang="zh-TW" altLang="en-US" dirty="0"/>
-          </a:p>
-          <a:p>
-            <a:pPr marL="158750" indent="0">
-              <a:buNone/>
-            </a:pPr>
-            <a:r>
-              <a:rPr lang="zh-TW" altLang="en-US" dirty="0"/>
-              <a:t>但如果要正式導入，仍需要進一步評估資料授權、第三方服務依賴、資安治理、使用者資料保護與維運責任。</a:t>
-            </a:r>
-            <a:endParaRPr lang="en-US" altLang="zh-TW" dirty="0"/>
-          </a:p>
-          <a:p>
-            <a:pPr marL="158750" indent="0">
-              <a:buNone/>
-            </a:pPr>
-            <a:endParaRPr lang="zh-TW" altLang="en-US" dirty="0"/>
-          </a:p>
-          <a:p>
-            <a:pPr marL="158750" indent="0">
-              <a:buNone/>
-            </a:pPr>
-            <a:r>
-              <a:rPr lang="zh-TW" altLang="en-US" dirty="0"/>
-              <a:t>以上就是今天針對 </a:t>
-            </a:r>
-            <a:r>
-              <a:rPr lang="en" altLang="zh-TW" dirty="0" err="1"/>
-              <a:t>OpenStock</a:t>
-            </a:r>
-            <a:r>
-              <a:rPr lang="en" altLang="zh-TW" dirty="0"/>
-              <a:t> </a:t>
-            </a:r>
-            <a:r>
-              <a:rPr lang="zh-TW" altLang="en-US" dirty="0"/>
-              <a:t>的介紹，謝謝大家。</a:t>
-            </a:r>
           </a:p>
         </p:txBody>
       </p:sp>
@@ -7810,7 +6796,7 @@
             </a:pPr>
             <a:r>
               <a:rPr lang="en-US" altLang="zh-TW" sz="1600" b="0" dirty="0"/>
-              <a:t>2026.06.03</a:t>
+              <a:t>2026.06.08</a:t>
             </a:r>
             <a:endParaRPr lang="en-US" sz="1600" b="0" dirty="0"/>
           </a:p>
@@ -12062,6 +11048,15 @@
 </file>
 
 <file path=customXml/item2.xml><?xml version="1.0" encoding="utf-8"?>
+<?mso-contentType ?>
+<FormTemplates xmlns="http://schemas.microsoft.com/sharepoint/v3/contenttype/forms">
+  <Display>DocumentLibraryForm</Display>
+  <Edit>DocumentLibraryForm</Edit>
+  <New>DocumentLibraryForm</New>
+</FormTemplates>
+</file>
+
+<file path=customXml/item3.xml><?xml version="1.0" encoding="utf-8"?>
 <ct:contentTypeSchema xmlns:ct="http://schemas.microsoft.com/office/2006/metadata/contentType" xmlns:ma="http://schemas.microsoft.com/office/2006/metadata/properties/metaAttributes" ct:_="" ma:_="" ma:contentTypeName="Document" ma:contentTypeID="0x010100DE4F25D0FF425B4EA678AC2414B6A709" ma:contentTypeVersion="10" ma:contentTypeDescription="Create a new document." ma:contentTypeScope="" ma:versionID="8ceec2ce155b1d63c0c6fcd4110f3cfe">
   <xsd:schema xmlns:xsd="http://www.w3.org/2001/XMLSchema" xmlns:xs="http://www.w3.org/2001/XMLSchema" xmlns:p="http://schemas.microsoft.com/office/2006/metadata/properties" xmlns:ns2="7cac0686-f0c7-4236-b000-d7b90732a875" xmlns:ns3="9bfc64f2-d580-4df8-9fa4-4631ad6ac43d" targetNamespace="http://schemas.microsoft.com/office/2006/metadata/properties" ma:root="true" ma:fieldsID="267f21102a69fda15f58a0ecdfc9abe1" ns2:_="" ns3:_="">
     <xsd:import namespace="7cac0686-f0c7-4236-b000-d7b90732a875"/>
@@ -12262,15 +11257,6 @@
 </ct:contentTypeSchema>
 </file>
 
-<file path=customXml/item3.xml><?xml version="1.0" encoding="utf-8"?>
-<?mso-contentType ?>
-<FormTemplates xmlns="http://schemas.microsoft.com/sharepoint/v3/contenttype/forms">
-  <Display>DocumentLibraryForm</Display>
-  <Edit>DocumentLibraryForm</Edit>
-  <New>DocumentLibraryForm</New>
-</FormTemplates>
-</file>
-
 <file path=customXml/itemProps1.xml><?xml version="1.0" encoding="utf-8"?>
 <ds:datastoreItem xmlns:ds="http://schemas.openxmlformats.org/officeDocument/2006/customXml" ds:itemID="{0FD5D526-59E0-46BD-B75A-4A393253F249}">
   <ds:schemaRefs>
@@ -12289,6 +11275,14 @@
 </file>
 
 <file path=customXml/itemProps2.xml><?xml version="1.0" encoding="utf-8"?>
+<ds:datastoreItem xmlns:ds="http://schemas.openxmlformats.org/officeDocument/2006/customXml" ds:itemID="{76929C79-DB32-411C-8C37-9A0BBBB5F642}">
+  <ds:schemaRefs>
+    <ds:schemaRef ds:uri="http://schemas.microsoft.com/sharepoint/v3/contenttype/forms"/>
+  </ds:schemaRefs>
+</ds:datastoreItem>
+</file>
+
+<file path=customXml/itemProps3.xml><?xml version="1.0" encoding="utf-8"?>
 <ds:datastoreItem xmlns:ds="http://schemas.openxmlformats.org/officeDocument/2006/customXml" ds:itemID="{6B3946E7-66F8-4182-AA38-CFC406C59F4E}">
   <ds:schemaRefs>
     <ds:schemaRef ds:uri="http://schemas.microsoft.com/office/2006/metadata/contentType"/>
@@ -12307,14 +11301,6 @@
 </ds:datastoreItem>
 </file>
 
-<file path=customXml/itemProps3.xml><?xml version="1.0" encoding="utf-8"?>
-<ds:datastoreItem xmlns:ds="http://schemas.openxmlformats.org/officeDocument/2006/customXml" ds:itemID="{76929C79-DB32-411C-8C37-9A0BBBB5F642}">
-  <ds:schemaRefs>
-    <ds:schemaRef ds:uri="http://schemas.microsoft.com/sharepoint/v3/contenttype/forms"/>
-  </ds:schemaRefs>
-</ds:datastoreItem>
-</file>
-
 <file path=docMetadata/LabelInfo.xml><?xml version="1.0" encoding="utf-8"?>
 <clbl:labelList xmlns:clbl="http://schemas.microsoft.com/office/2020/mipLabelMetadata">
   <clbl:label id="{217a5a3d-163a-4e8b-af1b-58fd7f92894f}" enabled="0" method="" siteId="{217a5a3d-163a-4e8b-af1b-58fd7f92894f}" removed="1"/>
